--- a/PPTs/Ch3_ARM_ISA Exercises  New.pptx
+++ b/PPTs/Ch3_ARM_ISA Exercises  New.pptx
@@ -5041,7 +5041,7 @@
           <a:p>
             <a:r>
               <a:rPr lang="en-US" dirty="0"/>
-              <a:t>Spring 2026</a:t>
+              <a:t>Fall 2026</a:t>
             </a:r>
           </a:p>
         </p:txBody>
@@ -11853,7 +11853,7 @@
                 </a:solidFill>
                 <a:latin typeface="Gill Sans MT"/>
               </a:rPr>
-              <a:t>What are the memory address of these four words?</a:t>
+              <a:t>What are the memory addresses of these four words?</a:t>
             </a:r>
           </a:p>
         </p:txBody>
@@ -14533,7 +14533,7 @@
                   <a:cs typeface="Courier New" charset="0"/>
                   <a:sym typeface="Courier New" charset="0"/>
                 </a:rPr>
-                <a:t>0x0012</a:t>
+                <a:t>0x000C</a:t>
               </a:r>
               <a:endParaRPr lang="en-US" sz="1300" b="1" dirty="0">
                 <a:solidFill>
@@ -15483,7 +15483,7 @@
                 </a:solidFill>
                 <a:latin typeface="Gill Sans MT"/>
               </a:rPr>
-              <a:t>What are the memory address of these four words?</a:t>
+              <a:t>What are the memory addresses of these four words?</a:t>
             </a:r>
           </a:p>
           <a:p>
